--- a/assets/pptx/catalog-332.pptx
+++ b/assets/pptx/catalog-332.pptx
@@ -3305,7 +3305,7 @@
                 <a:ea typeface="Ebrima"/>
                 <a:cs typeface="Ebrima"/>
               </a:rPr>
-              <a:t>አንተን አክብሮ ደሞ አስከብሮ (2x)</a:t>
+              <a:t>አንተን አክብሮ ደሞ አስከብሮ 2x</a:t>
             </a:r>
           </a:p>
         </p:txBody>
@@ -3493,7 +3493,7 @@
                 <a:ea typeface="Ebrima"/>
                 <a:cs typeface="Ebrima"/>
               </a:rPr>
-              <a:t>ሲያንሥህ ነው ጭብጨባ (4x)</a:t>
+              <a:t>ሲያንሥህ ነው ጭብጨባ 4x</a:t>
             </a:r>
           </a:p>
           <a:p>
@@ -3511,7 +3511,7 @@
                 <a:ea typeface="Ebrima"/>
                 <a:cs typeface="Ebrima"/>
               </a:rPr>
-              <a:t>ሲያንሥህ ነው ዕልልታ (4x)</a:t>
+              <a:t>ሲያንሥህ ነው ዕልልታ 4x</a:t>
             </a:r>
           </a:p>
         </p:txBody>
@@ -3596,7 +3596,7 @@
                 <a:ea typeface="Ebrima"/>
                 <a:cs typeface="Ebrima"/>
               </a:rPr>
-              <a:t>አምንሀለሁ ኢየሱስ አምንሀለሁ (2x)</a:t>
+              <a:t>አምንሀለሁ ኢየሱስ አምንሀለሁ 2x</a:t>
             </a:r>
           </a:p>
         </p:txBody>
@@ -3923,7 +3923,7 @@
                 <a:ea typeface="Ebrima"/>
                 <a:cs typeface="Ebrima"/>
               </a:rPr>
-              <a:t>አምንሀለሁ ኢየሱስ አምንሀለሁ (2x)</a:t>
+              <a:t>አምንሀለሁ ኢየሱስ አምንሀለሁ 2x</a:t>
             </a:r>
           </a:p>
         </p:txBody>
@@ -4268,7 +4268,7 @@
                 <a:ea typeface="Ebrima"/>
                 <a:cs typeface="Ebrima"/>
               </a:rPr>
-              <a:t>አምንሀለሁ ኢየሱስ አምንሀለሁ (2x)</a:t>
+              <a:t>አምንሀለሁ ኢየሱስ አምንሀለሁ 2x</a:t>
             </a:r>
           </a:p>
         </p:txBody>
